--- a/paper/system_architecture.pptx
+++ b/paper/system_architecture.pptx
@@ -302,7 +302,7 @@
           <a:p>
             <a:fld id="{5BCAD085-E8A6-8845-BD4E-CB4CCA059FC4}" type="datetimeFigureOut">
               <a:rPr lang="en-US" smtClean="0"/>
-              <a:t>8/11/2026</a:t>
+              <a:t>8/31/2026</a:t>
             </a:fld>
             <a:endParaRPr lang="en-US"/>
           </a:p>
@@ -470,7 +470,7 @@
           <a:p>
             <a:fld id="{5BCAD085-E8A6-8845-BD4E-CB4CCA059FC4}" type="datetimeFigureOut">
               <a:rPr lang="en-US" smtClean="0"/>
-              <a:t>8/11/2026</a:t>
+              <a:t>8/31/2026</a:t>
             </a:fld>
             <a:endParaRPr lang="en-US"/>
           </a:p>
@@ -648,7 +648,7 @@
           <a:p>
             <a:fld id="{5BCAD085-E8A6-8845-BD4E-CB4CCA059FC4}" type="datetimeFigureOut">
               <a:rPr lang="en-US" smtClean="0"/>
-              <a:t>8/11/2026</a:t>
+              <a:t>8/31/2026</a:t>
             </a:fld>
             <a:endParaRPr lang="en-US"/>
           </a:p>
@@ -816,7 +816,7 @@
           <a:p>
             <a:fld id="{5BCAD085-E8A6-8845-BD4E-CB4CCA059FC4}" type="datetimeFigureOut">
               <a:rPr lang="en-US" smtClean="0"/>
-              <a:t>8/11/2026</a:t>
+              <a:t>8/31/2026</a:t>
             </a:fld>
             <a:endParaRPr lang="en-US"/>
           </a:p>
@@ -1061,7 +1061,7 @@
           <a:p>
             <a:fld id="{5BCAD085-E8A6-8845-BD4E-CB4CCA059FC4}" type="datetimeFigureOut">
               <a:rPr lang="en-US" smtClean="0"/>
-              <a:t>8/11/2026</a:t>
+              <a:t>8/31/2026</a:t>
             </a:fld>
             <a:endParaRPr lang="en-US"/>
           </a:p>
@@ -1346,7 +1346,7 @@
           <a:p>
             <a:fld id="{5BCAD085-E8A6-8845-BD4E-CB4CCA059FC4}" type="datetimeFigureOut">
               <a:rPr lang="en-US" smtClean="0"/>
-              <a:t>8/11/2026</a:t>
+              <a:t>8/31/2026</a:t>
             </a:fld>
             <a:endParaRPr lang="en-US"/>
           </a:p>
@@ -1765,7 +1765,7 @@
           <a:p>
             <a:fld id="{5BCAD085-E8A6-8845-BD4E-CB4CCA059FC4}" type="datetimeFigureOut">
               <a:rPr lang="en-US" smtClean="0"/>
-              <a:t>8/11/2026</a:t>
+              <a:t>8/31/2026</a:t>
             </a:fld>
             <a:endParaRPr lang="en-US"/>
           </a:p>
@@ -1882,7 +1882,7 @@
           <a:p>
             <a:fld id="{5BCAD085-E8A6-8845-BD4E-CB4CCA059FC4}" type="datetimeFigureOut">
               <a:rPr lang="en-US" smtClean="0"/>
-              <a:t>8/11/2026</a:t>
+              <a:t>8/31/2026</a:t>
             </a:fld>
             <a:endParaRPr lang="en-US"/>
           </a:p>
@@ -1977,7 +1977,7 @@
           <a:p>
             <a:fld id="{5BCAD085-E8A6-8845-BD4E-CB4CCA059FC4}" type="datetimeFigureOut">
               <a:rPr lang="en-US" smtClean="0"/>
-              <a:t>8/11/2026</a:t>
+              <a:t>8/31/2026</a:t>
             </a:fld>
             <a:endParaRPr lang="en-US"/>
           </a:p>
@@ -2252,7 +2252,7 @@
           <a:p>
             <a:fld id="{5BCAD085-E8A6-8845-BD4E-CB4CCA059FC4}" type="datetimeFigureOut">
               <a:rPr lang="en-US" smtClean="0"/>
-              <a:t>8/11/2026</a:t>
+              <a:t>8/31/2026</a:t>
             </a:fld>
             <a:endParaRPr lang="en-US"/>
           </a:p>
@@ -2504,7 +2504,7 @@
           <a:p>
             <a:fld id="{5BCAD085-E8A6-8845-BD4E-CB4CCA059FC4}" type="datetimeFigureOut">
               <a:rPr lang="en-US" smtClean="0"/>
-              <a:t>8/11/2026</a:t>
+              <a:t>8/31/2026</a:t>
             </a:fld>
             <a:endParaRPr lang="en-US"/>
           </a:p>
@@ -2715,7 +2715,7 @@
           <a:p>
             <a:fld id="{5BCAD085-E8A6-8845-BD4E-CB4CCA059FC4}" type="datetimeFigureOut">
               <a:rPr lang="en-US" smtClean="0"/>
-              <a:t>8/11/2026</a:t>
+              <a:t>8/31/2026</a:t>
             </a:fld>
             <a:endParaRPr lang="en-US"/>
           </a:p>
@@ -3168,7 +3168,7 @@
           <a:lstStyle/>
           <a:p>
             <a:pPr algn="ctr"/>
-            <a:endParaRPr sz="1600">
+            <a:endParaRPr sz="2000">
               <a:latin typeface="TH SarabunPSK" panose="020B0500040200020003" pitchFamily="34" charset="-34"/>
               <a:cs typeface="TH SarabunPSK" panose="020B0500040200020003" pitchFamily="34" charset="-34"/>
             </a:endParaRPr>
@@ -3184,7 +3184,7 @@
         <p:spPr>
           <a:xfrm>
             <a:off x="548640" y="1463040"/>
-            <a:ext cx="2279791" cy="338554"/>
+            <a:ext cx="2805576" cy="400110"/>
           </a:xfrm>
           <a:prstGeom prst="rect">
             <a:avLst/>
@@ -3206,11 +3206,25 @@
               </a:defRPr>
             </a:pPr>
             <a:r>
-              <a:rPr sz="1600">
+              <a:rPr sz="2000" dirty="0">
                 <a:latin typeface="TH SarabunPSK" panose="020B0500040200020003" pitchFamily="34" charset="-34"/>
                 <a:cs typeface="TH SarabunPSK" panose="020B0500040200020003" pitchFamily="34" charset="-34"/>
               </a:rPr>
-              <a:t>1. ชั้นนำเข้าข้อมูล (Data Ingestion)</a:t>
+              <a:t>1. </a:t>
+            </a:r>
+            <a:r>
+              <a:rPr sz="2000" dirty="0" err="1">
+                <a:latin typeface="TH SarabunPSK" panose="020B0500040200020003" pitchFamily="34" charset="-34"/>
+                <a:cs typeface="TH SarabunPSK" panose="020B0500040200020003" pitchFamily="34" charset="-34"/>
+              </a:rPr>
+              <a:t>ชั้นนำเข้าข้อมูล</a:t>
+            </a:r>
+            <a:r>
+              <a:rPr sz="2000" dirty="0">
+                <a:latin typeface="TH SarabunPSK" panose="020B0500040200020003" pitchFamily="34" charset="-34"/>
+                <a:cs typeface="TH SarabunPSK" panose="020B0500040200020003" pitchFamily="34" charset="-34"/>
+              </a:rPr>
+              <a:t> (Data Ingestion)</a:t>
             </a:r>
           </a:p>
         </p:txBody>
@@ -3257,7 +3271,7 @@
           <a:lstStyle/>
           <a:p>
             <a:pPr algn="ctr"/>
-            <a:endParaRPr sz="1600">
+            <a:endParaRPr sz="2000">
               <a:latin typeface="TH SarabunPSK" panose="020B0500040200020003" pitchFamily="34" charset="-34"/>
               <a:cs typeface="TH SarabunPSK" panose="020B0500040200020003" pitchFamily="34" charset="-34"/>
             </a:endParaRPr>
@@ -3273,7 +3287,7 @@
         <p:spPr>
           <a:xfrm>
             <a:off x="4434840" y="1463040"/>
-            <a:ext cx="2967479" cy="338554"/>
+            <a:ext cx="3669594" cy="400110"/>
           </a:xfrm>
           <a:prstGeom prst="rect">
             <a:avLst/>
@@ -3295,11 +3309,25 @@
               </a:defRPr>
             </a:pPr>
             <a:r>
-              <a:rPr sz="1600">
+              <a:rPr sz="2000" dirty="0">
                 <a:latin typeface="TH SarabunPSK" panose="020B0500040200020003" pitchFamily="34" charset="-34"/>
                 <a:cs typeface="TH SarabunPSK" panose="020B0500040200020003" pitchFamily="34" charset="-34"/>
               </a:rPr>
-              <a:t>2. ชั้นประมวลผลข้อมูล (Orchestration &amp; NLP)</a:t>
+              <a:t>2. </a:t>
+            </a:r>
+            <a:r>
+              <a:rPr sz="2000" dirty="0" err="1">
+                <a:latin typeface="TH SarabunPSK" panose="020B0500040200020003" pitchFamily="34" charset="-34"/>
+                <a:cs typeface="TH SarabunPSK" panose="020B0500040200020003" pitchFamily="34" charset="-34"/>
+              </a:rPr>
+              <a:t>ชั้นประมวลผลข้อมูล</a:t>
+            </a:r>
+            <a:r>
+              <a:rPr sz="2000" dirty="0">
+                <a:latin typeface="TH SarabunPSK" panose="020B0500040200020003" pitchFamily="34" charset="-34"/>
+                <a:cs typeface="TH SarabunPSK" panose="020B0500040200020003" pitchFamily="34" charset="-34"/>
+              </a:rPr>
+              <a:t> (Orchestration &amp; NLP)</a:t>
             </a:r>
           </a:p>
         </p:txBody>
@@ -3346,7 +3374,7 @@
           <a:lstStyle/>
           <a:p>
             <a:pPr algn="ctr"/>
-            <a:endParaRPr sz="1600">
+            <a:endParaRPr sz="2000">
               <a:latin typeface="TH SarabunPSK" panose="020B0500040200020003" pitchFamily="34" charset="-34"/>
               <a:cs typeface="TH SarabunPSK" panose="020B0500040200020003" pitchFamily="34" charset="-34"/>
             </a:endParaRPr>
@@ -3361,8 +3389,8 @@
         </p:nvSpPr>
         <p:spPr>
           <a:xfrm>
-            <a:off x="8321040" y="1463040"/>
-            <a:ext cx="2645276" cy="338554"/>
+            <a:off x="8321040" y="1468472"/>
+            <a:ext cx="3259226" cy="400110"/>
           </a:xfrm>
           <a:prstGeom prst="rect">
             <a:avLst/>
@@ -3384,7 +3412,7 @@
               </a:defRPr>
             </a:pPr>
             <a:r>
-              <a:rPr sz="1600">
+              <a:rPr sz="2000" dirty="0">
                 <a:latin typeface="TH SarabunPSK" panose="020B0500040200020003" pitchFamily="34" charset="-34"/>
                 <a:cs typeface="TH SarabunPSK" panose="020B0500040200020003" pitchFamily="34" charset="-34"/>
               </a:rPr>
@@ -3443,34 +3471,34 @@
               </a:defRPr>
             </a:pPr>
             <a:r>
-              <a:rPr sz="1600" dirty="0" err="1">
+              <a:rPr sz="2000" dirty="0" err="1">
                 <a:latin typeface="TH SarabunPSK" panose="020B0500040200020003" pitchFamily="34" charset="-34"/>
                 <a:cs typeface="TH SarabunPSK" panose="020B0500040200020003" pitchFamily="34" charset="-34"/>
               </a:rPr>
               <a:t>ข่าวออนไลน์</a:t>
             </a:r>
             <a:r>
-              <a:rPr sz="1600" dirty="0">
+              <a:rPr sz="2000" dirty="0">
                 <a:latin typeface="TH SarabunPSK" panose="020B0500040200020003" pitchFamily="34" charset="-34"/>
                 <a:cs typeface="TH SarabunPSK" panose="020B0500040200020003" pitchFamily="34" charset="-34"/>
               </a:rPr>
               <a:t> / </a:t>
             </a:r>
             <a:r>
-              <a:rPr sz="1600" dirty="0" err="1">
+              <a:rPr sz="2000" dirty="0" err="1">
                 <a:latin typeface="TH SarabunPSK" panose="020B0500040200020003" pitchFamily="34" charset="-34"/>
                 <a:cs typeface="TH SarabunPSK" panose="020B0500040200020003" pitchFamily="34" charset="-34"/>
               </a:rPr>
               <a:t>สื่อดิจิทัลด้านภัยพิบัติ</a:t>
             </a:r>
             <a:br>
-              <a:rPr sz="1600" dirty="0">
+              <a:rPr sz="2000" dirty="0">
                 <a:latin typeface="TH SarabunPSK" panose="020B0500040200020003" pitchFamily="34" charset="-34"/>
                 <a:cs typeface="TH SarabunPSK" panose="020B0500040200020003" pitchFamily="34" charset="-34"/>
               </a:rPr>
             </a:br>
             <a:r>
-              <a:rPr sz="1600" dirty="0">
+              <a:rPr sz="2000" dirty="0">
                 <a:latin typeface="TH SarabunPSK" panose="020B0500040200020003" pitchFamily="34" charset="-34"/>
                 <a:cs typeface="TH SarabunPSK" panose="020B0500040200020003" pitchFamily="34" charset="-34"/>
               </a:rPr>
@@ -3529,20 +3557,20 @@
               </a:defRPr>
             </a:pPr>
             <a:r>
-              <a:rPr sz="1600">
+              <a:rPr sz="2000">
                 <a:latin typeface="TH SarabunPSK" panose="020B0500040200020003" pitchFamily="34" charset="-34"/>
                 <a:cs typeface="TH SarabunPSK" panose="020B0500040200020003" pitchFamily="34" charset="-34"/>
               </a:rPr>
               <a:t>Node.js Web Scraper</a:t>
             </a:r>
             <a:br>
-              <a:rPr sz="1600">
+              <a:rPr sz="2000">
                 <a:latin typeface="TH SarabunPSK" panose="020B0500040200020003" pitchFamily="34" charset="-34"/>
                 <a:cs typeface="TH SarabunPSK" panose="020B0500040200020003" pitchFamily="34" charset="-34"/>
               </a:rPr>
             </a:br>
             <a:r>
-              <a:rPr sz="1600">
+              <a:rPr sz="2000">
                 <a:latin typeface="TH SarabunPSK" panose="020B0500040200020003" pitchFamily="34" charset="-34"/>
                 <a:cs typeface="TH SarabunPSK" panose="020B0500040200020003" pitchFamily="34" charset="-34"/>
               </a:rPr>
@@ -3601,20 +3629,20 @@
               </a:defRPr>
             </a:pPr>
             <a:r>
-              <a:rPr sz="1600">
+              <a:rPr sz="2000">
                 <a:latin typeface="TH SarabunPSK" panose="020B0500040200020003" pitchFamily="34" charset="-34"/>
                 <a:cs typeface="TH SarabunPSK" panose="020B0500040200020003" pitchFamily="34" charset="-34"/>
               </a:rPr>
               <a:t>n8n Workflow Orchestrator</a:t>
             </a:r>
             <a:br>
-              <a:rPr sz="1600">
+              <a:rPr sz="2000">
                 <a:latin typeface="TH SarabunPSK" panose="020B0500040200020003" pitchFamily="34" charset="-34"/>
                 <a:cs typeface="TH SarabunPSK" panose="020B0500040200020003" pitchFamily="34" charset="-34"/>
               </a:rPr>
             </a:br>
             <a:r>
-              <a:rPr sz="1600">
+              <a:rPr sz="2000">
                 <a:latin typeface="TH SarabunPSK" panose="020B0500040200020003" pitchFamily="34" charset="-34"/>
                 <a:cs typeface="TH SarabunPSK" panose="020B0500040200020003" pitchFamily="34" charset="-34"/>
               </a:rPr>
@@ -3673,20 +3701,20 @@
               </a:defRPr>
             </a:pPr>
             <a:r>
-              <a:rPr sz="1600">
+              <a:rPr sz="2000">
                 <a:latin typeface="TH SarabunPSK" panose="020B0500040200020003" pitchFamily="34" charset="-34"/>
                 <a:cs typeface="TH SarabunPSK" panose="020B0500040200020003" pitchFamily="34" charset="-34"/>
               </a:rPr>
               <a:t>Google Gemini API</a:t>
             </a:r>
             <a:br>
-              <a:rPr sz="1600">
+              <a:rPr sz="2000">
                 <a:latin typeface="TH SarabunPSK" panose="020B0500040200020003" pitchFamily="34" charset="-34"/>
                 <a:cs typeface="TH SarabunPSK" panose="020B0500040200020003" pitchFamily="34" charset="-34"/>
               </a:rPr>
             </a:br>
             <a:r>
-              <a:rPr sz="1600">
+              <a:rPr sz="2000">
                 <a:latin typeface="TH SarabunPSK" panose="020B0500040200020003" pitchFamily="34" charset="-34"/>
                 <a:cs typeface="TH SarabunPSK" panose="020B0500040200020003" pitchFamily="34" charset="-34"/>
               </a:rPr>
@@ -3745,20 +3773,20 @@
               </a:defRPr>
             </a:pPr>
             <a:r>
-              <a:rPr sz="1600">
+              <a:rPr sz="2000">
                 <a:latin typeface="TH SarabunPSK" panose="020B0500040200020003" pitchFamily="34" charset="-34"/>
                 <a:cs typeface="TH SarabunPSK" panose="020B0500040200020003" pitchFamily="34" charset="-34"/>
               </a:rPr>
               <a:t>JSON Database</a:t>
             </a:r>
             <a:br>
-              <a:rPr sz="1600">
+              <a:rPr sz="2000">
                 <a:latin typeface="TH SarabunPSK" panose="020B0500040200020003" pitchFamily="34" charset="-34"/>
                 <a:cs typeface="TH SarabunPSK" panose="020B0500040200020003" pitchFamily="34" charset="-34"/>
               </a:rPr>
             </a:br>
             <a:r>
-              <a:rPr sz="1600">
+              <a:rPr sz="2000">
                 <a:latin typeface="TH SarabunPSK" panose="020B0500040200020003" pitchFamily="34" charset="-34"/>
                 <a:cs typeface="TH SarabunPSK" panose="020B0500040200020003" pitchFamily="34" charset="-34"/>
               </a:rPr>
@@ -3817,20 +3845,20 @@
               </a:defRPr>
             </a:pPr>
             <a:r>
-              <a:rPr sz="1600">
+              <a:rPr sz="2000">
                 <a:latin typeface="TH SarabunPSK" panose="020B0500040200020003" pitchFamily="34" charset="-34"/>
                 <a:cs typeface="TH SarabunPSK" panose="020B0500040200020003" pitchFamily="34" charset="-34"/>
               </a:rPr>
               <a:t>แดชบอร์ดสรุปเหตุการณ์</a:t>
             </a:r>
             <a:br>
-              <a:rPr sz="1600">
+              <a:rPr sz="2000">
                 <a:latin typeface="TH SarabunPSK" panose="020B0500040200020003" pitchFamily="34" charset="-34"/>
                 <a:cs typeface="TH SarabunPSK" panose="020B0500040200020003" pitchFamily="34" charset="-34"/>
               </a:rPr>
             </a:br>
             <a:r>
-              <a:rPr sz="1600">
+              <a:rPr sz="2000">
                 <a:latin typeface="TH SarabunPSK" panose="020B0500040200020003" pitchFamily="34" charset="-34"/>
                 <a:cs typeface="TH SarabunPSK" panose="020B0500040200020003" pitchFamily="34" charset="-34"/>
               </a:rPr>
@@ -3889,20 +3917,20 @@
               </a:defRPr>
             </a:pPr>
             <a:r>
-              <a:rPr sz="1600">
+              <a:rPr sz="2000">
                 <a:latin typeface="TH SarabunPSK" panose="020B0500040200020003" pitchFamily="34" charset="-34"/>
                 <a:cs typeface="TH SarabunPSK" panose="020B0500040200020003" pitchFamily="34" charset="-34"/>
               </a:rPr>
               <a:t>แผนที่ความร้อนเชิงพื้นที่</a:t>
             </a:r>
             <a:br>
-              <a:rPr sz="1600">
+              <a:rPr sz="2000">
                 <a:latin typeface="TH SarabunPSK" panose="020B0500040200020003" pitchFamily="34" charset="-34"/>
                 <a:cs typeface="TH SarabunPSK" panose="020B0500040200020003" pitchFamily="34" charset="-34"/>
               </a:rPr>
             </a:br>
             <a:r>
-              <a:rPr sz="1600">
+              <a:rPr sz="2000">
                 <a:latin typeface="TH SarabunPSK" panose="020B0500040200020003" pitchFamily="34" charset="-34"/>
                 <a:cs typeface="TH SarabunPSK" panose="020B0500040200020003" pitchFamily="34" charset="-34"/>
               </a:rPr>
@@ -3951,7 +3979,7 @@
           <a:lstStyle/>
           <a:p>
             <a:pPr algn="ctr"/>
-            <a:endParaRPr sz="1600">
+            <a:endParaRPr sz="2000">
               <a:latin typeface="TH SarabunPSK" panose="020B0500040200020003" pitchFamily="34" charset="-34"/>
               <a:cs typeface="TH SarabunPSK" panose="020B0500040200020003" pitchFamily="34" charset="-34"/>
             </a:endParaRPr>
@@ -3998,7 +4026,7 @@
           <a:lstStyle/>
           <a:p>
             <a:pPr algn="ctr"/>
-            <a:endParaRPr sz="1600">
+            <a:endParaRPr sz="2000">
               <a:latin typeface="TH SarabunPSK" panose="020B0500040200020003" pitchFamily="34" charset="-34"/>
               <a:cs typeface="TH SarabunPSK" panose="020B0500040200020003" pitchFamily="34" charset="-34"/>
             </a:endParaRPr>
@@ -4045,7 +4073,7 @@
           <a:lstStyle/>
           <a:p>
             <a:pPr algn="ctr"/>
-            <a:endParaRPr sz="1600">
+            <a:endParaRPr sz="2000">
               <a:latin typeface="TH SarabunPSK" panose="020B0500040200020003" pitchFamily="34" charset="-34"/>
               <a:cs typeface="TH SarabunPSK" panose="020B0500040200020003" pitchFamily="34" charset="-34"/>
             </a:endParaRPr>
@@ -4092,7 +4120,7 @@
           <a:lstStyle/>
           <a:p>
             <a:pPr algn="ctr"/>
-            <a:endParaRPr sz="1600">
+            <a:endParaRPr sz="2000">
               <a:latin typeface="TH SarabunPSK" panose="020B0500040200020003" pitchFamily="34" charset="-34"/>
               <a:cs typeface="TH SarabunPSK" panose="020B0500040200020003" pitchFamily="34" charset="-34"/>
             </a:endParaRPr>
@@ -4139,7 +4167,7 @@
           <a:lstStyle/>
           <a:p>
             <a:pPr algn="ctr"/>
-            <a:endParaRPr sz="1600">
+            <a:endParaRPr sz="2000">
               <a:latin typeface="TH SarabunPSK" panose="020B0500040200020003" pitchFamily="34" charset="-34"/>
               <a:cs typeface="TH SarabunPSK" panose="020B0500040200020003" pitchFamily="34" charset="-34"/>
             </a:endParaRPr>
@@ -4186,7 +4214,7 @@
           <a:lstStyle/>
           <a:p>
             <a:pPr algn="ctr"/>
-            <a:endParaRPr sz="1600">
+            <a:endParaRPr sz="2000">
               <a:latin typeface="TH SarabunPSK" panose="020B0500040200020003" pitchFamily="34" charset="-34"/>
               <a:cs typeface="TH SarabunPSK" panose="020B0500040200020003" pitchFamily="34" charset="-34"/>
             </a:endParaRPr>
@@ -4233,7 +4261,7 @@
           <a:lstStyle/>
           <a:p>
             <a:pPr algn="ctr"/>
-            <a:endParaRPr sz="1600">
+            <a:endParaRPr sz="2000">
               <a:latin typeface="TH SarabunPSK" panose="020B0500040200020003" pitchFamily="34" charset="-34"/>
               <a:cs typeface="TH SarabunPSK" panose="020B0500040200020003" pitchFamily="34" charset="-34"/>
             </a:endParaRPr>
